--- a/docs/transferai-admin/Webinaire_Recherche_Documentaire_RAG_Medard_Sery_Soulemane_Konate.pptx
+++ b/docs/transferai-admin/Webinaire_Recherche_Documentaire_RAG_Medard_Sery_Soulemane_Konate.pptx
@@ -8,6 +8,8 @@
     <p:sldId id="256" r:id="rId2"/>
     <p:sldId id="257" r:id="rId3"/>
     <p:sldId id="258" r:id="rId4"/>
+    <p:sldId id="260" r:id="rId11"/>
+    <p:sldId id="261" r:id="rId12"/>
     <p:sldId id="259" r:id="rId5"/>
   </p:sldIdLst>
   <p:notesMasterIdLst>
@@ -4621,6 +4623,1436 @@
 </p:sld>
 </file>
 
+<file path=ppt/slides/slide5.xml><?xml version="1.0" encoding="utf-8"?>
+<p:sld xmlns:a="http://schemas.openxmlformats.org/drawingml/2006/main" xmlns:r="http://schemas.openxmlformats.org/officeDocument/2006/relationships" xmlns:p="http://schemas.openxmlformats.org/presentationml/2006/main">
+  <p:cSld name="Applications par secteur">
+    <p:bg>
+      <p:bgPr>
+        <a:solidFill>
+          <a:srgbClr val="0D1724"/>
+        </a:solidFill>
+      </p:bgPr>
+    </p:bg>
+    <p:spTree>
+      <p:nvGrpSpPr>
+        <p:cNvPr id="1" name=""/>
+        <p:cNvGrpSpPr/>
+        <p:nvPr/>
+      </p:nvGrpSpPr>
+      <p:grpSpPr>
+        <a:xfrm>
+          <a:off x="0" y="0"/>
+          <a:ext cx="0" cy="0"/>
+          <a:chOff x="0" y="0"/>
+          <a:chExt cx="0" cy="0"/>
+        </a:xfrm>
+      </p:grpSpPr>
+      <p:sp>
+        <p:nvSpPr>
+          <p:cNvPr id="2" name="Text"/>
+          <p:cNvSpPr/>
+          <p:nvPr/>
+        </p:nvSpPr>
+        <p:spPr>
+          <a:xfrm>
+            <a:off x="548640" y="411480"/>
+            <a:ext cx="10515600" cy="457200"/>
+          </a:xfrm>
+          <a:prstGeom prst="rect">
+            <a:avLst/>
+          </a:prstGeom>
+          <a:noFill/>
+          <a:ln/>
+        </p:spPr>
+        <p:txBody>
+          <a:bodyPr wrap="square" rtlCol="0" anchor="ctr"/>
+          <a:lstStyle/>
+          <a:p>
+            <a:pPr indent="0" marL="0">
+              <a:buNone/>
+            </a:pPr>
+            <a:r>
+              <a:rPr lang="en-US" sz="2400" b="1" dirty="0">
+                <a:solidFill>
+                  <a:srgbClr val="FFFFFF"/>
+                </a:solidFill>
+                <a:latin typeface="Calibri" pitchFamily="34" charset="0"/>
+                <a:ea typeface="Calibri" pitchFamily="34" charset="-122"/>
+                <a:cs typeface="Calibri" pitchFamily="34" charset="-120"/>
+              </a:rPr>
+              <a:t>Applications par secteur d'activité</a:t>
+            </a:r>
+            <a:endParaRPr lang="en-US" sz="2400" dirty="0"/>
+          </a:p>
+        </p:txBody>
+      </p:sp>
+      <p:sp>
+        <p:nvSpPr>
+          <p:cNvPr id="3" name="Text"/>
+          <p:cNvSpPr/>
+          <p:nvPr/>
+        </p:nvSpPr>
+        <p:spPr>
+          <a:xfrm>
+            <a:off x="548640" y="868680"/>
+            <a:ext cx="10698480" cy="548640"/>
+          </a:xfrm>
+          <a:prstGeom prst="rect">
+            <a:avLst/>
+          </a:prstGeom>
+          <a:noFill/>
+          <a:ln/>
+        </p:spPr>
+        <p:txBody>
+          <a:bodyPr wrap="square" rtlCol="0" anchor="t"/>
+          <a:lstStyle/>
+          <a:p>
+            <a:pPr indent="0" marL="0">
+              <a:buNone/>
+            </a:pPr>
+            <a:r>
+              <a:rPr lang="en-US" sz="1300" dirty="0">
+                <a:solidFill>
+                  <a:srgbClr val="C3D0D8"/>
+                </a:solidFill>
+                <a:latin typeface="Calibri" pitchFamily="34" charset="0"/>
+                <a:ea typeface="Calibri" pitchFamily="34" charset="-122"/>
+                <a:cs typeface="Calibri" pitchFamily="34" charset="-120"/>
+              </a:rPr>
+              <a:t>Le RAG est transversal : implémenté pour un métier, il se réplique presque à l'identique dans un autre.</a:t>
+            </a:r>
+            <a:endParaRPr lang="en-US" sz="1300" dirty="0"/>
+          </a:p>
+        </p:txBody>
+      </p:sp>
+      <p:sp>
+        <p:nvSpPr>
+          <p:cNvPr id="4" name="Shape"/>
+          <p:cNvSpPr/>
+          <p:nvPr/>
+        </p:nvSpPr>
+        <p:spPr>
+          <a:xfrm>
+            <a:off x="548640" y="1450000"/>
+            <a:ext cx="3474720" cy="1750000"/>
+          </a:xfrm>
+          <a:prstGeom prst="roundRect">
+            <a:avLst>
+              <a:gd name="adj" fmla="val 6154"/>
+            </a:avLst>
+          </a:prstGeom>
+          <a:solidFill>
+            <a:srgbClr val="17324D"/>
+          </a:solidFill>
+          <a:ln/>
+        </p:spPr>
+      </p:sp>
+      <p:sp>
+        <p:nvSpPr>
+          <p:cNvPr id="5" name="Text"/>
+          <p:cNvSpPr/>
+          <p:nvPr/>
+        </p:nvSpPr>
+        <p:spPr>
+          <a:xfrm>
+            <a:off x="748640" y="1610000"/>
+            <a:ext cx="3074720" cy="420000"/>
+          </a:xfrm>
+          <a:prstGeom prst="rect">
+            <a:avLst/>
+          </a:prstGeom>
+          <a:noFill/>
+          <a:ln/>
+        </p:spPr>
+        <p:txBody>
+          <a:bodyPr wrap="square" rtlCol="0" anchor="t"/>
+          <a:lstStyle/>
+          <a:p>
+            <a:pPr indent="0" marL="0">
+              <a:buNone/>
+            </a:pPr>
+            <a:r>
+              <a:rPr lang="en-US" sz="1400" b="1" dirty="0">
+                <a:solidFill>
+                  <a:srgbClr val="FFFFFF"/>
+                </a:solidFill>
+                <a:latin typeface="Calibri" pitchFamily="34" charset="0"/>
+                <a:ea typeface="Calibri" pitchFamily="34" charset="-122"/>
+                <a:cs typeface="Calibri" pitchFamily="34" charset="-120"/>
+              </a:rPr>
+              <a:t>Ressources Humaines</a:t>
+            </a:r>
+            <a:endParaRPr lang="en-US" sz="1400" dirty="0"/>
+          </a:p>
+        </p:txBody>
+      </p:sp>
+      <p:sp>
+        <p:nvSpPr>
+          <p:cNvPr id="6" name="Text"/>
+          <p:cNvSpPr/>
+          <p:nvPr/>
+        </p:nvSpPr>
+        <p:spPr>
+          <a:xfrm>
+            <a:off x="748640" y="2010000"/>
+            <a:ext cx="3074720" cy="1050000"/>
+          </a:xfrm>
+          <a:prstGeom prst="rect">
+            <a:avLst/>
+          </a:prstGeom>
+          <a:noFill/>
+          <a:ln/>
+        </p:spPr>
+        <p:txBody>
+          <a:bodyPr wrap="square" rtlCol="0" anchor="t"/>
+          <a:lstStyle/>
+          <a:p>
+            <a:pPr indent="0" marL="0">
+              <a:buNone/>
+            </a:pPr>
+            <a:r>
+              <a:rPr lang="en-US" sz="1000" dirty="0">
+                <a:solidFill>
+                  <a:srgbClr val="C3D0D8"/>
+                </a:solidFill>
+                <a:latin typeface="Calibri" pitchFamily="34" charset="0"/>
+                <a:ea typeface="Calibri" pitchFamily="34" charset="-122"/>
+                <a:cs typeface="Calibri" pitchFamily="34" charset="-120"/>
+              </a:rPr>
+              <a:t>Convention collective et procédures RH en libre-service ; intégration accélérée des nouveaux employés.</a:t>
+            </a:r>
+            <a:endParaRPr lang="en-US" sz="1000" dirty="0"/>
+          </a:p>
+        </p:txBody>
+      </p:sp>
+      <p:sp>
+        <p:nvSpPr>
+          <p:cNvPr id="7" name="Shape"/>
+          <p:cNvSpPr/>
+          <p:nvPr/>
+        </p:nvSpPr>
+        <p:spPr>
+          <a:xfrm>
+            <a:off x="4251960" y="1450000"/>
+            <a:ext cx="3474720" cy="1750000"/>
+          </a:xfrm>
+          <a:prstGeom prst="roundRect">
+            <a:avLst>
+              <a:gd name="adj" fmla="val 6154"/>
+            </a:avLst>
+          </a:prstGeom>
+          <a:solidFill>
+            <a:srgbClr val="17324D"/>
+          </a:solidFill>
+          <a:ln/>
+        </p:spPr>
+      </p:sp>
+      <p:sp>
+        <p:nvSpPr>
+          <p:cNvPr id="8" name="Text"/>
+          <p:cNvSpPr/>
+          <p:nvPr/>
+        </p:nvSpPr>
+        <p:spPr>
+          <a:xfrm>
+            <a:off x="4451960" y="1610000"/>
+            <a:ext cx="3074720" cy="420000"/>
+          </a:xfrm>
+          <a:prstGeom prst="rect">
+            <a:avLst/>
+          </a:prstGeom>
+          <a:noFill/>
+          <a:ln/>
+        </p:spPr>
+        <p:txBody>
+          <a:bodyPr wrap="square" rtlCol="0" anchor="t"/>
+          <a:lstStyle/>
+          <a:p>
+            <a:pPr indent="0" marL="0">
+              <a:buNone/>
+            </a:pPr>
+            <a:r>
+              <a:rPr lang="en-US" sz="1400" b="1" dirty="0">
+                <a:solidFill>
+                  <a:srgbClr val="FFFFFF"/>
+                </a:solidFill>
+                <a:latin typeface="Calibri" pitchFamily="34" charset="0"/>
+                <a:ea typeface="Calibri" pitchFamily="34" charset="-122"/>
+                <a:cs typeface="Calibri" pitchFamily="34" charset="-120"/>
+              </a:rPr>
+              <a:t>Finance &amp; Banques</a:t>
+            </a:r>
+            <a:endParaRPr lang="en-US" sz="1400" dirty="0"/>
+          </a:p>
+        </p:txBody>
+      </p:sp>
+      <p:sp>
+        <p:nvSpPr>
+          <p:cNvPr id="9" name="Text"/>
+          <p:cNvSpPr/>
+          <p:nvPr/>
+        </p:nvSpPr>
+        <p:spPr>
+          <a:xfrm>
+            <a:off x="4451960" y="2010000"/>
+            <a:ext cx="3074720" cy="1050000"/>
+          </a:xfrm>
+          <a:prstGeom prst="rect">
+            <a:avLst/>
+          </a:prstGeom>
+          <a:noFill/>
+          <a:ln/>
+        </p:spPr>
+        <p:txBody>
+          <a:bodyPr wrap="square" rtlCol="0" anchor="t"/>
+          <a:lstStyle/>
+          <a:p>
+            <a:pPr indent="0" marL="0">
+              <a:buNone/>
+            </a:pPr>
+            <a:r>
+              <a:rPr lang="en-US" sz="1000" dirty="0">
+                <a:solidFill>
+                  <a:srgbClr val="C3D0D8"/>
+                </a:solidFill>
+                <a:latin typeface="Calibri" pitchFamily="34" charset="0"/>
+                <a:ea typeface="Calibri" pitchFamily="34" charset="-122"/>
+                <a:cs typeface="Calibri" pitchFamily="34" charset="-120"/>
+              </a:rPr>
+              <a:t>Conformité UEMOA/BCEAO et clauses contractuelles retrouvées en secondes ; pré-clôture et audit accélérés.</a:t>
+            </a:r>
+            <a:endParaRPr lang="en-US" sz="1000" dirty="0"/>
+          </a:p>
+        </p:txBody>
+      </p:sp>
+      <p:sp>
+        <p:nvSpPr>
+          <p:cNvPr id="10" name="Shape"/>
+          <p:cNvSpPr/>
+          <p:nvPr/>
+        </p:nvSpPr>
+        <p:spPr>
+          <a:xfrm>
+            <a:off x="7955280" y="1450000"/>
+            <a:ext cx="3474720" cy="1750000"/>
+          </a:xfrm>
+          <a:prstGeom prst="roundRect">
+            <a:avLst>
+              <a:gd name="adj" fmla="val 6154"/>
+            </a:avLst>
+          </a:prstGeom>
+          <a:solidFill>
+            <a:srgbClr val="17324D"/>
+          </a:solidFill>
+          <a:ln/>
+        </p:spPr>
+      </p:sp>
+      <p:sp>
+        <p:nvSpPr>
+          <p:cNvPr id="11" name="Text"/>
+          <p:cNvSpPr/>
+          <p:nvPr/>
+        </p:nvSpPr>
+        <p:spPr>
+          <a:xfrm>
+            <a:off x="8155280" y="1610000"/>
+            <a:ext cx="3074720" cy="420000"/>
+          </a:xfrm>
+          <a:prstGeom prst="rect">
+            <a:avLst/>
+          </a:prstGeom>
+          <a:noFill/>
+          <a:ln/>
+        </p:spPr>
+        <p:txBody>
+          <a:bodyPr wrap="square" rtlCol="0" anchor="t"/>
+          <a:lstStyle/>
+          <a:p>
+            <a:pPr indent="0" marL="0">
+              <a:buNone/>
+            </a:pPr>
+            <a:r>
+              <a:rPr lang="en-US" sz="1400" b="1" dirty="0">
+                <a:solidFill>
+                  <a:srgbClr val="FFFFFF"/>
+                </a:solidFill>
+                <a:latin typeface="Calibri" pitchFamily="34" charset="0"/>
+                <a:ea typeface="Calibri" pitchFamily="34" charset="-122"/>
+                <a:cs typeface="Calibri" pitchFamily="34" charset="-120"/>
+              </a:rPr>
+              <a:t>Transport &amp; Logistique</a:t>
+            </a:r>
+            <a:endParaRPr lang="en-US" sz="1400" dirty="0"/>
+          </a:p>
+        </p:txBody>
+      </p:sp>
+      <p:sp>
+        <p:nvSpPr>
+          <p:cNvPr id="12" name="Text"/>
+          <p:cNvSpPr/>
+          <p:nvPr/>
+        </p:nvSpPr>
+        <p:spPr>
+          <a:xfrm>
+            <a:off x="8155280" y="2010000"/>
+            <a:ext cx="3074720" cy="1050000"/>
+          </a:xfrm>
+          <a:prstGeom prst="rect">
+            <a:avLst/>
+          </a:prstGeom>
+          <a:noFill/>
+          <a:ln/>
+        </p:spPr>
+        <p:txBody>
+          <a:bodyPr wrap="square" rtlCol="0" anchor="t"/>
+          <a:lstStyle/>
+          <a:p>
+            <a:pPr indent="0" marL="0">
+              <a:buNone/>
+            </a:pPr>
+            <a:r>
+              <a:rPr lang="en-US" sz="1000" dirty="0">
+                <a:solidFill>
+                  <a:srgbClr val="C3D0D8"/>
+                </a:solidFill>
+                <a:latin typeface="Calibri" pitchFamily="34" charset="0"/>
+                <a:ea typeface="Calibri" pitchFamily="34" charset="-122"/>
+                <a:cs typeface="Calibri" pitchFamily="34" charset="-120"/>
+              </a:rPr>
+              <a:t>Procédures de sécurité et exigences douanières par corridor ; formation des chauffeurs accélérée.</a:t>
+            </a:r>
+            <a:endParaRPr lang="en-US" sz="1000" dirty="0"/>
+          </a:p>
+        </p:txBody>
+      </p:sp>
+      <p:sp>
+        <p:nvSpPr>
+          <p:cNvPr id="13" name="Shape"/>
+          <p:cNvSpPr/>
+          <p:nvPr/>
+        </p:nvSpPr>
+        <p:spPr>
+          <a:xfrm>
+            <a:off x="548640" y="3360000"/>
+            <a:ext cx="3474720" cy="1750000"/>
+          </a:xfrm>
+          <a:prstGeom prst="roundRect">
+            <a:avLst>
+              <a:gd name="adj" fmla="val 6154"/>
+            </a:avLst>
+          </a:prstGeom>
+          <a:solidFill>
+            <a:srgbClr val="17324D"/>
+          </a:solidFill>
+          <a:ln/>
+        </p:spPr>
+      </p:sp>
+      <p:sp>
+        <p:nvSpPr>
+          <p:cNvPr id="14" name="Text"/>
+          <p:cNvSpPr/>
+          <p:nvPr/>
+        </p:nvSpPr>
+        <p:spPr>
+          <a:xfrm>
+            <a:off x="748640" y="3520000"/>
+            <a:ext cx="3074720" cy="420000"/>
+          </a:xfrm>
+          <a:prstGeom prst="rect">
+            <a:avLst/>
+          </a:prstGeom>
+          <a:noFill/>
+          <a:ln/>
+        </p:spPr>
+        <p:txBody>
+          <a:bodyPr wrap="square" rtlCol="0" anchor="t"/>
+          <a:lstStyle/>
+          <a:p>
+            <a:pPr indent="0" marL="0">
+              <a:buNone/>
+            </a:pPr>
+            <a:r>
+              <a:rPr lang="en-US" sz="1400" b="1" dirty="0">
+                <a:solidFill>
+                  <a:srgbClr val="FFFFFF"/>
+                </a:solidFill>
+                <a:latin typeface="Calibri" pitchFamily="34" charset="0"/>
+                <a:ea typeface="Calibri" pitchFamily="34" charset="-122"/>
+                <a:cs typeface="Calibri" pitchFamily="34" charset="-120"/>
+              </a:rPr>
+              <a:t>Santé</a:t>
+            </a:r>
+            <a:endParaRPr lang="en-US" sz="1400" dirty="0"/>
+          </a:p>
+        </p:txBody>
+      </p:sp>
+      <p:sp>
+        <p:nvSpPr>
+          <p:cNvPr id="15" name="Text"/>
+          <p:cNvSpPr/>
+          <p:nvPr/>
+        </p:nvSpPr>
+        <p:spPr>
+          <a:xfrm>
+            <a:off x="748640" y="3920000"/>
+            <a:ext cx="3074720" cy="1050000"/>
+          </a:xfrm>
+          <a:prstGeom prst="rect">
+            <a:avLst/>
+          </a:prstGeom>
+          <a:noFill/>
+          <a:ln/>
+        </p:spPr>
+        <p:txBody>
+          <a:bodyPr wrap="square" rtlCol="0" anchor="t"/>
+          <a:lstStyle/>
+          <a:p>
+            <a:pPr indent="0" marL="0">
+              <a:buNone/>
+            </a:pPr>
+            <a:r>
+              <a:rPr lang="en-US" sz="1000" dirty="0">
+                <a:solidFill>
+                  <a:srgbClr val="C3D0D8"/>
+                </a:solidFill>
+                <a:latin typeface="Calibri" pitchFamily="34" charset="0"/>
+                <a:ea typeface="Calibri" pitchFamily="34" charset="-122"/>
+                <a:cs typeface="Calibri" pitchFamily="34" charset="-120"/>
+              </a:rPr>
+              <a:t>Protocoles et posologies retrouvés avec la source citée ; mise à jour immédiate des pratiques.</a:t>
+            </a:r>
+            <a:endParaRPr lang="en-US" sz="1000" dirty="0"/>
+          </a:p>
+        </p:txBody>
+      </p:sp>
+      <p:sp>
+        <p:nvSpPr>
+          <p:cNvPr id="16" name="Shape"/>
+          <p:cNvSpPr/>
+          <p:nvPr/>
+        </p:nvSpPr>
+        <p:spPr>
+          <a:xfrm>
+            <a:off x="4251960" y="3360000"/>
+            <a:ext cx="3474720" cy="1750000"/>
+          </a:xfrm>
+          <a:prstGeom prst="roundRect">
+            <a:avLst>
+              <a:gd name="adj" fmla="val 6154"/>
+            </a:avLst>
+          </a:prstGeom>
+          <a:solidFill>
+            <a:srgbClr val="17324D"/>
+          </a:solidFill>
+          <a:ln/>
+        </p:spPr>
+      </p:sp>
+      <p:sp>
+        <p:nvSpPr>
+          <p:cNvPr id="17" name="Text"/>
+          <p:cNvSpPr/>
+          <p:nvPr/>
+        </p:nvSpPr>
+        <p:spPr>
+          <a:xfrm>
+            <a:off x="4451960" y="3520000"/>
+            <a:ext cx="3074720" cy="420000"/>
+          </a:xfrm>
+          <a:prstGeom prst="rect">
+            <a:avLst/>
+          </a:prstGeom>
+          <a:noFill/>
+          <a:ln/>
+        </p:spPr>
+        <p:txBody>
+          <a:bodyPr wrap="square" rtlCol="0" anchor="t"/>
+          <a:lstStyle/>
+          <a:p>
+            <a:pPr indent="0" marL="0">
+              <a:buNone/>
+            </a:pPr>
+            <a:r>
+              <a:rPr lang="en-US" sz="1400" b="1" dirty="0">
+                <a:solidFill>
+                  <a:srgbClr val="FFFFFF"/>
+                </a:solidFill>
+                <a:latin typeface="Calibri" pitchFamily="34" charset="0"/>
+                <a:ea typeface="Calibri" pitchFamily="34" charset="-122"/>
+                <a:cs typeface="Calibri" pitchFamily="34" charset="-120"/>
+              </a:rPr>
+              <a:t>Éducation &amp; Formation</a:t>
+            </a:r>
+            <a:endParaRPr lang="en-US" sz="1400" dirty="0"/>
+          </a:p>
+        </p:txBody>
+      </p:sp>
+      <p:sp>
+        <p:nvSpPr>
+          <p:cNvPr id="18" name="Text"/>
+          <p:cNvSpPr/>
+          <p:nvPr/>
+        </p:nvSpPr>
+        <p:spPr>
+          <a:xfrm>
+            <a:off x="4451960" y="3920000"/>
+            <a:ext cx="3074720" cy="1050000"/>
+          </a:xfrm>
+          <a:prstGeom prst="rect">
+            <a:avLst/>
+          </a:prstGeom>
+          <a:noFill/>
+          <a:ln/>
+        </p:spPr>
+        <p:txBody>
+          <a:bodyPr wrap="square" rtlCol="0" anchor="t"/>
+          <a:lstStyle/>
+          <a:p>
+            <a:pPr indent="0" marL="0">
+              <a:buNone/>
+            </a:pPr>
+            <a:r>
+              <a:rPr lang="en-US" sz="1000" dirty="0">
+                <a:solidFill>
+                  <a:srgbClr val="C3D0D8"/>
+                </a:solidFill>
+                <a:latin typeface="Calibri" pitchFamily="34" charset="0"/>
+                <a:ea typeface="Calibri" pitchFamily="34" charset="-122"/>
+                <a:cs typeface="Calibri" pitchFamily="34" charset="-120"/>
+              </a:rPr>
+              <a:t>Réponses sourcées aux apprenants à partir des vrais supports de cours, disponibles hors des heures de cours.</a:t>
+            </a:r>
+            <a:endParaRPr lang="en-US" sz="1000" dirty="0"/>
+          </a:p>
+        </p:txBody>
+      </p:sp>
+      <p:sp>
+        <p:nvSpPr>
+          <p:cNvPr id="19" name="Shape"/>
+          <p:cNvSpPr/>
+          <p:nvPr/>
+        </p:nvSpPr>
+        <p:spPr>
+          <a:xfrm>
+            <a:off x="7955280" y="3360000"/>
+            <a:ext cx="3474720" cy="1750000"/>
+          </a:xfrm>
+          <a:prstGeom prst="roundRect">
+            <a:avLst>
+              <a:gd name="adj" fmla="val 6154"/>
+            </a:avLst>
+          </a:prstGeom>
+          <a:solidFill>
+            <a:srgbClr val="17324D"/>
+          </a:solidFill>
+          <a:ln/>
+        </p:spPr>
+      </p:sp>
+      <p:sp>
+        <p:nvSpPr>
+          <p:cNvPr id="20" name="Text"/>
+          <p:cNvSpPr/>
+          <p:nvPr/>
+        </p:nvSpPr>
+        <p:spPr>
+          <a:xfrm>
+            <a:off x="8155280" y="3520000"/>
+            <a:ext cx="3074720" cy="420000"/>
+          </a:xfrm>
+          <a:prstGeom prst="rect">
+            <a:avLst/>
+          </a:prstGeom>
+          <a:noFill/>
+          <a:ln/>
+        </p:spPr>
+        <p:txBody>
+          <a:bodyPr wrap="square" rtlCol="0" anchor="t"/>
+          <a:lstStyle/>
+          <a:p>
+            <a:pPr indent="0" marL="0">
+              <a:buNone/>
+            </a:pPr>
+            <a:r>
+              <a:rPr lang="en-US" sz="1400" b="1" dirty="0">
+                <a:solidFill>
+                  <a:srgbClr val="FFFFFF"/>
+                </a:solidFill>
+                <a:latin typeface="Calibri" pitchFamily="34" charset="0"/>
+                <a:ea typeface="Calibri" pitchFamily="34" charset="-122"/>
+                <a:cs typeface="Calibri" pitchFamily="34" charset="-120"/>
+              </a:rPr>
+              <a:t>Juridique &amp; Conformité</a:t>
+            </a:r>
+            <a:endParaRPr lang="en-US" sz="1400" dirty="0"/>
+          </a:p>
+        </p:txBody>
+      </p:sp>
+      <p:sp>
+        <p:nvSpPr>
+          <p:cNvPr id="21" name="Text"/>
+          <p:cNvSpPr/>
+          <p:nvPr/>
+        </p:nvSpPr>
+        <p:spPr>
+          <a:xfrm>
+            <a:off x="8155280" y="3920000"/>
+            <a:ext cx="3074720" cy="1050000"/>
+          </a:xfrm>
+          <a:prstGeom prst="rect">
+            <a:avLst/>
+          </a:prstGeom>
+          <a:noFill/>
+          <a:ln/>
+        </p:spPr>
+        <p:txBody>
+          <a:bodyPr wrap="square" rtlCol="0" anchor="t"/>
+          <a:lstStyle/>
+          <a:p>
+            <a:pPr indent="0" marL="0">
+              <a:buNone/>
+            </a:pPr>
+            <a:r>
+              <a:rPr lang="en-US" sz="1000" dirty="0">
+                <a:solidFill>
+                  <a:srgbClr val="C3D0D8"/>
+                </a:solidFill>
+                <a:latin typeface="Calibri" pitchFamily="34" charset="0"/>
+                <a:ea typeface="Calibri" pitchFamily="34" charset="-122"/>
+                <a:cs typeface="Calibri" pitchFamily="34" charset="-120"/>
+              </a:rPr>
+              <a:t>Clauses et précédents retrouvés instantanément ; interprétation uniforme entre collaborateurs.</a:t>
+            </a:r>
+            <a:endParaRPr lang="en-US" sz="1000" dirty="0"/>
+          </a:p>
+        </p:txBody>
+      </p:sp>
+      <p:sp>
+        <p:nvSpPr>
+          <p:cNvPr id="22" name="Text"/>
+          <p:cNvSpPr/>
+          <p:nvPr/>
+        </p:nvSpPr>
+        <p:spPr>
+          <a:xfrm>
+            <a:off x="548640" y="5320000"/>
+            <a:ext cx="10881360" cy="400000"/>
+          </a:xfrm>
+          <a:prstGeom prst="rect">
+            <a:avLst/>
+          </a:prstGeom>
+          <a:noFill/>
+          <a:ln/>
+        </p:spPr>
+        <p:txBody>
+          <a:bodyPr wrap="square" rtlCol="0" anchor="ctr"/>
+          <a:lstStyle/>
+          <a:p>
+            <a:pPr indent="0" marL="0">
+              <a:buNone/>
+            </a:pPr>
+            <a:r>
+              <a:rPr lang="en-US" sz="1050" i="1" dirty="0">
+                <a:solidFill>
+                  <a:srgbClr val="8598A0"/>
+                </a:solidFill>
+                <a:latin typeface="Calibri" pitchFamily="34" charset="0"/>
+                <a:ea typeface="Calibri" pitchFamily="34" charset="-122"/>
+                <a:cs typeface="Calibri" pitchFamily="34" charset="-120"/>
+              </a:rPr>
+              <a:t>Et au-delà : secteur public, support client, toute organisation avec une documentation structurée.</a:t>
+            </a:r>
+            <a:endParaRPr lang="en-US" sz="1050" dirty="0"/>
+          </a:p>
+        </p:txBody>
+      </p:sp>
+      <p:sp>
+        <p:nvSpPr>
+          <p:cNvPr id="23" name="Text"/>
+          <p:cNvSpPr/>
+          <p:nvPr/>
+        </p:nvSpPr>
+        <p:spPr>
+          <a:xfrm>
+            <a:off x="457200" y="6473952"/>
+            <a:ext cx="7315200" cy="274320"/>
+          </a:xfrm>
+          <a:prstGeom prst="rect">
+            <a:avLst/>
+          </a:prstGeom>
+          <a:noFill/>
+          <a:ln/>
+        </p:spPr>
+        <p:txBody>
+          <a:bodyPr wrap="square" rtlCol="0" anchor="ctr"/>
+          <a:lstStyle/>
+          <a:p>
+            <a:pPr indent="0" marL="0">
+              <a:buNone/>
+            </a:pPr>
+            <a:r>
+              <a:rPr lang="en-US" sz="900" dirty="0">
+                <a:solidFill>
+                  <a:srgbClr val="8598A0"/>
+                </a:solidFill>
+                <a:latin typeface="Calibri" pitchFamily="34" charset="0"/>
+                <a:ea typeface="Calibri" pitchFamily="34" charset="-122"/>
+                <a:cs typeface="Calibri" pitchFamily="34" charset="-120"/>
+              </a:rPr>
+              <a:t>TransferAI Africa  •  Recherche Documentaire Intelligente (RAG)</a:t>
+            </a:r>
+            <a:endParaRPr lang="en-US" sz="900" dirty="0"/>
+          </a:p>
+        </p:txBody>
+      </p:sp>
+      <p:sp>
+        <p:nvSpPr>
+          <p:cNvPr id="24" name="Text"/>
+          <p:cNvSpPr/>
+          <p:nvPr/>
+        </p:nvSpPr>
+        <p:spPr>
+          <a:xfrm>
+            <a:off x="8503920" y="6473952"/>
+            <a:ext cx="3200400" cy="274320"/>
+          </a:xfrm>
+          <a:prstGeom prst="rect">
+            <a:avLst/>
+          </a:prstGeom>
+          <a:noFill/>
+          <a:ln/>
+        </p:spPr>
+        <p:txBody>
+          <a:bodyPr wrap="square" rtlCol="0" anchor="ctr"/>
+          <a:lstStyle/>
+          <a:p>
+            <a:pPr algn="r" indent="0" marL="0">
+              <a:buNone/>
+            </a:pPr>
+            <a:r>
+              <a:rPr lang="en-US" sz="900" dirty="0">
+                <a:solidFill>
+                  <a:srgbClr val="8598A0"/>
+                </a:solidFill>
+                <a:latin typeface="Calibri" pitchFamily="34" charset="0"/>
+                <a:ea typeface="Calibri" pitchFamily="34" charset="-122"/>
+                <a:cs typeface="Calibri" pitchFamily="34" charset="-120"/>
+              </a:rPr>
+              <a:t>18 juillet 2026</a:t>
+            </a:r>
+            <a:endParaRPr lang="en-US" sz="900" dirty="0"/>
+          </a:p>
+        </p:txBody>
+      </p:sp>
+    </p:spTree>
+  </p:cSld>
+  <p:clrMapOvr>
+    <a:masterClrMapping/>
+  </p:clrMapOvr>
+</p:sld>
+</file>
+
+<file path=ppt/slides/slide6.xml><?xml version="1.0" encoding="utf-8"?>
+<p:sld xmlns:a="http://schemas.openxmlformats.org/drawingml/2006/main" xmlns:r="http://schemas.openxmlformats.org/officeDocument/2006/relationships" xmlns:p="http://schemas.openxmlformats.org/presentationml/2006/main">
+  <p:cSld name="Benefices et ROI">
+    <p:bg>
+      <p:bgPr>
+        <a:solidFill>
+          <a:srgbClr val="0D1724"/>
+        </a:solidFill>
+      </p:bgPr>
+    </p:bg>
+    <p:spTree>
+      <p:nvGrpSpPr>
+        <p:cNvPr id="1" name=""/>
+        <p:cNvGrpSpPr/>
+        <p:nvPr/>
+      </p:nvGrpSpPr>
+      <p:grpSpPr>
+        <a:xfrm>
+          <a:off x="0" y="0"/>
+          <a:ext cx="0" cy="0"/>
+          <a:chOff x="0" y="0"/>
+          <a:chExt cx="0" cy="0"/>
+        </a:xfrm>
+      </p:grpSpPr>
+      <p:sp>
+        <p:nvSpPr>
+          <p:cNvPr id="2" name="Text"/>
+          <p:cNvSpPr/>
+          <p:nvPr/>
+        </p:nvSpPr>
+        <p:spPr>
+          <a:xfrm>
+            <a:off x="548640" y="411480"/>
+            <a:ext cx="10515600" cy="457200"/>
+          </a:xfrm>
+          <a:prstGeom prst="rect">
+            <a:avLst/>
+          </a:prstGeom>
+          <a:noFill/>
+          <a:ln/>
+        </p:spPr>
+        <p:txBody>
+          <a:bodyPr wrap="square" rtlCol="0" anchor="ctr"/>
+          <a:lstStyle/>
+          <a:p>
+            <a:pPr indent="0" marL="0">
+              <a:buNone/>
+            </a:pPr>
+            <a:r>
+              <a:rPr lang="en-US" sz="2400" b="1" dirty="0">
+                <a:solidFill>
+                  <a:srgbClr val="FFFFFF"/>
+                </a:solidFill>
+                <a:latin typeface="Calibri" pitchFamily="34" charset="0"/>
+                <a:ea typeface="Calibri" pitchFamily="34" charset="-122"/>
+                <a:cs typeface="Calibri" pitchFamily="34" charset="-120"/>
+              </a:rPr>
+              <a:t>Bénéfices &amp; retour sur investissement</a:t>
+            </a:r>
+            <a:endParaRPr lang="en-US" sz="2400" dirty="0"/>
+          </a:p>
+        </p:txBody>
+      </p:sp>
+      <p:sp>
+        <p:nvSpPr>
+          <p:cNvPr id="3" name="Text"/>
+          <p:cNvSpPr/>
+          <p:nvPr/>
+        </p:nvSpPr>
+        <p:spPr>
+          <a:xfrm>
+            <a:off x="548640" y="868680"/>
+            <a:ext cx="10698480" cy="548640"/>
+          </a:xfrm>
+          <a:prstGeom prst="rect">
+            <a:avLst/>
+          </a:prstGeom>
+          <a:noFill/>
+          <a:ln/>
+        </p:spPr>
+        <p:txBody>
+          <a:bodyPr wrap="square" rtlCol="0" anchor="t"/>
+          <a:lstStyle/>
+          <a:p>
+            <a:pPr indent="0" marL="0">
+              <a:buNone/>
+            </a:pPr>
+            <a:r>
+              <a:rPr lang="en-US" sz="1300" dirty="0">
+                <a:solidFill>
+                  <a:srgbClr val="C3D0D8"/>
+                </a:solidFill>
+                <a:latin typeface="Calibri" pitchFamily="34" charset="0"/>
+                <a:ea typeface="Calibri" pitchFamily="34" charset="-122"/>
+                <a:cs typeface="Calibri" pitchFamily="34" charset="-120"/>
+              </a:rPr>
+              <a:t>Ce n'est pas théorique : c'est ce que produit, en conditions réelles, le système TransferAI Africa.</a:t>
+            </a:r>
+            <a:endParaRPr lang="en-US" sz="1300" dirty="0"/>
+          </a:p>
+        </p:txBody>
+      </p:sp>
+      <p:sp>
+        <p:nvSpPr>
+          <p:cNvPr id="4" name="Shape"/>
+          <p:cNvSpPr/>
+          <p:nvPr/>
+        </p:nvSpPr>
+        <p:spPr>
+          <a:xfrm>
+            <a:off x="548640" y="1450000"/>
+            <a:ext cx="3474720" cy="1850000"/>
+          </a:xfrm>
+          <a:prstGeom prst="roundRect">
+            <a:avLst>
+              <a:gd name="adj" fmla="val 6154"/>
+            </a:avLst>
+          </a:prstGeom>
+          <a:solidFill>
+            <a:srgbClr val="0F3540"/>
+          </a:solidFill>
+          <a:ln w="6350">
+            <a:solidFill>
+              <a:srgbClr val="3FC1D0"/>
+            </a:solidFill>
+            <a:prstDash val="solid"/>
+          </a:ln>
+        </p:spPr>
+      </p:sp>
+      <p:sp>
+        <p:nvSpPr>
+          <p:cNvPr id="5" name="Text"/>
+          <p:cNvSpPr/>
+          <p:nvPr/>
+        </p:nvSpPr>
+        <p:spPr>
+          <a:xfrm>
+            <a:off x="748640" y="1610000"/>
+            <a:ext cx="3074720" cy="420000"/>
+          </a:xfrm>
+          <a:prstGeom prst="rect">
+            <a:avLst/>
+          </a:prstGeom>
+          <a:noFill/>
+          <a:ln/>
+        </p:spPr>
+        <p:txBody>
+          <a:bodyPr wrap="square" rtlCol="0" anchor="t"/>
+          <a:lstStyle/>
+          <a:p>
+            <a:pPr indent="0" marL="0">
+              <a:buNone/>
+            </a:pPr>
+            <a:r>
+              <a:rPr lang="en-US" sz="1600" b="1" dirty="0">
+                <a:solidFill>
+                  <a:srgbClr val="3FC1D0"/>
+                </a:solidFill>
+                <a:latin typeface="Calibri" pitchFamily="34" charset="0"/>
+                <a:ea typeface="Calibri" pitchFamily="34" charset="-122"/>
+                <a:cs typeface="Calibri" pitchFamily="34" charset="-120"/>
+              </a:rPr>
+              <a:t>Précision</a:t>
+            </a:r>
+            <a:endParaRPr lang="en-US" sz="1600" dirty="0"/>
+          </a:p>
+        </p:txBody>
+      </p:sp>
+      <p:sp>
+        <p:nvSpPr>
+          <p:cNvPr id="6" name="Text"/>
+          <p:cNvSpPr/>
+          <p:nvPr/>
+        </p:nvSpPr>
+        <p:spPr>
+          <a:xfrm>
+            <a:off x="748640" y="2070000"/>
+            <a:ext cx="3074720" cy="1090000"/>
+          </a:xfrm>
+          <a:prstGeom prst="rect">
+            <a:avLst/>
+          </a:prstGeom>
+          <a:noFill/>
+          <a:ln/>
+        </p:spPr>
+        <p:txBody>
+          <a:bodyPr wrap="square" rtlCol="0" anchor="t"/>
+          <a:lstStyle/>
+          <a:p>
+            <a:pPr indent="0" marL="0">
+              <a:buNone/>
+            </a:pPr>
+            <a:r>
+              <a:rPr lang="en-US" sz="1000" dirty="0">
+                <a:solidFill>
+                  <a:srgbClr val="C3D0D8"/>
+                </a:solidFill>
+                <a:latin typeface="Calibri" pitchFamily="34" charset="0"/>
+                <a:ea typeface="Calibri" pitchFamily="34" charset="-122"/>
+                <a:cs typeface="Calibri" pitchFamily="34" charset="-120"/>
+              </a:rPr>
+              <a:t>La réponse s'appuie sur de vrais documents de l'organisation, pas sur des connaissances générales potentiellement fausses ou obsolètes.</a:t>
+            </a:r>
+            <a:endParaRPr lang="en-US" sz="1000" dirty="0"/>
+          </a:p>
+        </p:txBody>
+      </p:sp>
+      <p:sp>
+        <p:nvSpPr>
+          <p:cNvPr id="7" name="Shape"/>
+          <p:cNvSpPr/>
+          <p:nvPr/>
+        </p:nvSpPr>
+        <p:spPr>
+          <a:xfrm>
+            <a:off x="4251960" y="1450000"/>
+            <a:ext cx="3474720" cy="1850000"/>
+          </a:xfrm>
+          <a:prstGeom prst="roundRect">
+            <a:avLst>
+              <a:gd name="adj" fmla="val 6154"/>
+            </a:avLst>
+          </a:prstGeom>
+          <a:solidFill>
+            <a:srgbClr val="0F3540"/>
+          </a:solidFill>
+          <a:ln w="6350">
+            <a:solidFill>
+              <a:srgbClr val="3FC1D0"/>
+            </a:solidFill>
+            <a:prstDash val="solid"/>
+          </a:ln>
+        </p:spPr>
+      </p:sp>
+      <p:sp>
+        <p:nvSpPr>
+          <p:cNvPr id="8" name="Text"/>
+          <p:cNvSpPr/>
+          <p:nvPr/>
+        </p:nvSpPr>
+        <p:spPr>
+          <a:xfrm>
+            <a:off x="4451960" y="1610000"/>
+            <a:ext cx="3074720" cy="420000"/>
+          </a:xfrm>
+          <a:prstGeom prst="rect">
+            <a:avLst/>
+          </a:prstGeom>
+          <a:noFill/>
+          <a:ln/>
+        </p:spPr>
+        <p:txBody>
+          <a:bodyPr wrap="square" rtlCol="0" anchor="t"/>
+          <a:lstStyle/>
+          <a:p>
+            <a:pPr indent="0" marL="0">
+              <a:buNone/>
+            </a:pPr>
+            <a:r>
+              <a:rPr lang="en-US" sz="1600" b="1" dirty="0">
+                <a:solidFill>
+                  <a:srgbClr val="3FC1D0"/>
+                </a:solidFill>
+                <a:latin typeface="Calibri" pitchFamily="34" charset="0"/>
+                <a:ea typeface="Calibri" pitchFamily="34" charset="-122"/>
+                <a:cs typeface="Calibri" pitchFamily="34" charset="-120"/>
+              </a:rPr>
+              <a:t>Fraîcheur</a:t>
+            </a:r>
+            <a:endParaRPr lang="en-US" sz="1600" dirty="0"/>
+          </a:p>
+        </p:txBody>
+      </p:sp>
+      <p:sp>
+        <p:nvSpPr>
+          <p:cNvPr id="9" name="Text"/>
+          <p:cNvSpPr/>
+          <p:nvPr/>
+        </p:nvSpPr>
+        <p:spPr>
+          <a:xfrm>
+            <a:off x="4451960" y="2070000"/>
+            <a:ext cx="3074720" cy="1090000"/>
+          </a:xfrm>
+          <a:prstGeom prst="rect">
+            <a:avLst/>
+          </a:prstGeom>
+          <a:noFill/>
+          <a:ln/>
+        </p:spPr>
+        <p:txBody>
+          <a:bodyPr wrap="square" rtlCol="0" anchor="t"/>
+          <a:lstStyle/>
+          <a:p>
+            <a:pPr indent="0" marL="0">
+              <a:buNone/>
+            </a:pPr>
+            <a:r>
+              <a:rPr lang="en-US" sz="1000" dirty="0">
+                <a:solidFill>
+                  <a:srgbClr val="C3D0D8"/>
+                </a:solidFill>
+                <a:latin typeface="Calibri" pitchFamily="34" charset="0"/>
+                <a:ea typeface="Calibri" pitchFamily="34" charset="-122"/>
+                <a:cs typeface="Calibri" pitchFamily="34" charset="-120"/>
+              </a:rPr>
+              <a:t>Il suffit d'ajouter ou de mettre à jour un document pour que l'IA en tienne compte — pas besoin de réentraîner un modèle.</a:t>
+            </a:r>
+            <a:endParaRPr lang="en-US" sz="1000" dirty="0"/>
+          </a:p>
+        </p:txBody>
+      </p:sp>
+      <p:sp>
+        <p:nvSpPr>
+          <p:cNvPr id="10" name="Shape"/>
+          <p:cNvSpPr/>
+          <p:nvPr/>
+        </p:nvSpPr>
+        <p:spPr>
+          <a:xfrm>
+            <a:off x="7955280" y="1450000"/>
+            <a:ext cx="3474720" cy="1850000"/>
+          </a:xfrm>
+          <a:prstGeom prst="roundRect">
+            <a:avLst>
+              <a:gd name="adj" fmla="val 6154"/>
+            </a:avLst>
+          </a:prstGeom>
+          <a:solidFill>
+            <a:srgbClr val="0F3540"/>
+          </a:solidFill>
+          <a:ln w="6350">
+            <a:solidFill>
+              <a:srgbClr val="3FC1D0"/>
+            </a:solidFill>
+            <a:prstDash val="solid"/>
+          </a:ln>
+        </p:spPr>
+      </p:sp>
+      <p:sp>
+        <p:nvSpPr>
+          <p:cNvPr id="11" name="Text"/>
+          <p:cNvSpPr/>
+          <p:nvPr/>
+        </p:nvSpPr>
+        <p:spPr>
+          <a:xfrm>
+            <a:off x="8155280" y="1610000"/>
+            <a:ext cx="3074720" cy="420000"/>
+          </a:xfrm>
+          <a:prstGeom prst="rect">
+            <a:avLst/>
+          </a:prstGeom>
+          <a:noFill/>
+          <a:ln/>
+        </p:spPr>
+        <p:txBody>
+          <a:bodyPr wrap="square" rtlCol="0" anchor="t"/>
+          <a:lstStyle/>
+          <a:p>
+            <a:pPr indent="0" marL="0">
+              <a:buNone/>
+            </a:pPr>
+            <a:r>
+              <a:rPr lang="en-US" sz="1600" b="1" dirty="0">
+                <a:solidFill>
+                  <a:srgbClr val="3FC1D0"/>
+                </a:solidFill>
+                <a:latin typeface="Calibri" pitchFamily="34" charset="0"/>
+                <a:ea typeface="Calibri" pitchFamily="34" charset="-122"/>
+                <a:cs typeface="Calibri" pitchFamily="34" charset="-120"/>
+              </a:rPr>
+              <a:t>Traçabilité</a:t>
+            </a:r>
+            <a:endParaRPr lang="en-US" sz="1600" dirty="0"/>
+          </a:p>
+        </p:txBody>
+      </p:sp>
+      <p:sp>
+        <p:nvSpPr>
+          <p:cNvPr id="12" name="Text"/>
+          <p:cNvSpPr/>
+          <p:nvPr/>
+        </p:nvSpPr>
+        <p:spPr>
+          <a:xfrm>
+            <a:off x="8155280" y="2070000"/>
+            <a:ext cx="3074720" cy="1090000"/>
+          </a:xfrm>
+          <a:prstGeom prst="rect">
+            <a:avLst/>
+          </a:prstGeom>
+          <a:noFill/>
+          <a:ln/>
+        </p:spPr>
+        <p:txBody>
+          <a:bodyPr wrap="square" rtlCol="0" anchor="t"/>
+          <a:lstStyle/>
+          <a:p>
+            <a:pPr indent="0" marL="0">
+              <a:buNone/>
+            </a:pPr>
+            <a:r>
+              <a:rPr lang="en-US" sz="1000" dirty="0">
+                <a:solidFill>
+                  <a:srgbClr val="C3D0D8"/>
+                </a:solidFill>
+                <a:latin typeface="Calibri" pitchFamily="34" charset="0"/>
+                <a:ea typeface="Calibri" pitchFamily="34" charset="-122"/>
+                <a:cs typeface="Calibri" pitchFamily="34" charset="-120"/>
+              </a:rPr>
+              <a:t>Chaque réponse peut être reliée à sa source documentaire, ce qui permet de vérifier et de faire confiance à l'information fournie.</a:t>
+            </a:r>
+            <a:endParaRPr lang="en-US" sz="1000" dirty="0"/>
+          </a:p>
+        </p:txBody>
+      </p:sp>
+      <p:sp>
+        <p:nvSpPr>
+          <p:cNvPr id="13" name="Shape"/>
+          <p:cNvSpPr/>
+          <p:nvPr/>
+        </p:nvSpPr>
+        <p:spPr>
+          <a:xfrm>
+            <a:off x="548640" y="3600000"/>
+            <a:ext cx="10881360" cy="1554480"/>
+          </a:xfrm>
+          <a:prstGeom prst="roundRect">
+            <a:avLst>
+              <a:gd name="adj" fmla="val 4706"/>
+            </a:avLst>
+          </a:prstGeom>
+          <a:solidFill>
+            <a:srgbClr val="3FC1D0"/>
+          </a:solidFill>
+          <a:ln/>
+        </p:spPr>
+      </p:sp>
+      <p:sp>
+        <p:nvSpPr>
+          <p:cNvPr id="14" name="Text"/>
+          <p:cNvSpPr/>
+          <p:nvPr/>
+        </p:nvSpPr>
+        <p:spPr>
+          <a:xfrm>
+            <a:off x="822960" y="3737160"/>
+            <a:ext cx="10332720" cy="548640"/>
+          </a:xfrm>
+          <a:prstGeom prst="rect">
+            <a:avLst/>
+          </a:prstGeom>
+          <a:noFill/>
+          <a:ln/>
+        </p:spPr>
+        <p:txBody>
+          <a:bodyPr wrap="square" rtlCol="0" anchor="t"/>
+          <a:lstStyle/>
+          <a:p>
+            <a:pPr indent="0" marL="0">
+              <a:buNone/>
+            </a:pPr>
+            <a:r>
+              <a:rPr lang="en-US" sz="1300" b="1" dirty="0">
+                <a:solidFill>
+                  <a:srgbClr val="0D1724"/>
+                </a:solidFill>
+                <a:latin typeface="Calibri" pitchFamily="34" charset="0"/>
+                <a:ea typeface="Calibri" pitchFamily="34" charset="-122"/>
+                <a:cs typeface="Calibri" pitchFamily="34" charset="-120"/>
+              </a:rPr>
+              <a:t>Objectif réaliste : plusieurs heures de temps productif récupérées par semaine, par collaborateur exposé à des recherches documentaires fréquentes.</a:t>
+            </a:r>
+            <a:endParaRPr lang="en-US" sz="1300" dirty="0"/>
+          </a:p>
+        </p:txBody>
+      </p:sp>
+      <p:sp>
+        <p:nvSpPr>
+          <p:cNvPr id="15" name="Text"/>
+          <p:cNvSpPr/>
+          <p:nvPr/>
+        </p:nvSpPr>
+        <p:spPr>
+          <a:xfrm>
+            <a:off x="822960" y="4423000"/>
+            <a:ext cx="10332720" cy="640000"/>
+          </a:xfrm>
+          <a:prstGeom prst="rect">
+            <a:avLst/>
+          </a:prstGeom>
+          <a:noFill/>
+          <a:ln/>
+        </p:spPr>
+        <p:txBody>
+          <a:bodyPr wrap="square" rtlCol="0" anchor="t"/>
+          <a:lstStyle/>
+          <a:p>
+            <a:pPr indent="0" marL="0">
+              <a:buNone/>
+            </a:pPr>
+            <a:r>
+              <a:rPr lang="en-US" sz="1050" i="1" dirty="0">
+                <a:solidFill>
+                  <a:srgbClr val="0A2F35"/>
+                </a:solidFill>
+                <a:latin typeface="Calibri" pitchFamily="34" charset="0"/>
+                <a:ea typeface="Calibri" pitchFamily="34" charset="-122"/>
+                <a:cs typeface="Calibri" pitchFamily="34" charset="-120"/>
+              </a:rPr>
+              <a:t>Ces ordres de grandeur restent à valider spécifiquement pour chaque organisation — c'est précisément l'objet d'un premier diagnostic avant tout déploiement.</a:t>
+            </a:r>
+            <a:endParaRPr lang="en-US" sz="1050" dirty="0"/>
+          </a:p>
+        </p:txBody>
+      </p:sp>
+      <p:sp>
+        <p:nvSpPr>
+          <p:cNvPr id="16" name="Text"/>
+          <p:cNvSpPr/>
+          <p:nvPr/>
+        </p:nvSpPr>
+        <p:spPr>
+          <a:xfrm>
+            <a:off x="457200" y="6473952"/>
+            <a:ext cx="7315200" cy="274320"/>
+          </a:xfrm>
+          <a:prstGeom prst="rect">
+            <a:avLst/>
+          </a:prstGeom>
+          <a:noFill/>
+          <a:ln/>
+        </p:spPr>
+        <p:txBody>
+          <a:bodyPr wrap="square" rtlCol="0" anchor="ctr"/>
+          <a:lstStyle/>
+          <a:p>
+            <a:pPr indent="0" marL="0">
+              <a:buNone/>
+            </a:pPr>
+            <a:r>
+              <a:rPr lang="en-US" sz="900" dirty="0">
+                <a:solidFill>
+                  <a:srgbClr val="8598A0"/>
+                </a:solidFill>
+                <a:latin typeface="Calibri" pitchFamily="34" charset="0"/>
+                <a:ea typeface="Calibri" pitchFamily="34" charset="-122"/>
+                <a:cs typeface="Calibri" pitchFamily="34" charset="-120"/>
+              </a:rPr>
+              <a:t>TransferAI Africa  •  Recherche Documentaire Intelligente (RAG)</a:t>
+            </a:r>
+            <a:endParaRPr lang="en-US" sz="900" dirty="0"/>
+          </a:p>
+        </p:txBody>
+      </p:sp>
+      <p:sp>
+        <p:nvSpPr>
+          <p:cNvPr id="17" name="Text"/>
+          <p:cNvSpPr/>
+          <p:nvPr/>
+        </p:nvSpPr>
+        <p:spPr>
+          <a:xfrm>
+            <a:off x="8503920" y="6473952"/>
+            <a:ext cx="3200400" cy="274320"/>
+          </a:xfrm>
+          <a:prstGeom prst="rect">
+            <a:avLst/>
+          </a:prstGeom>
+          <a:noFill/>
+          <a:ln/>
+        </p:spPr>
+        <p:txBody>
+          <a:bodyPr wrap="square" rtlCol="0" anchor="ctr"/>
+          <a:lstStyle/>
+          <a:p>
+            <a:pPr algn="r" indent="0" marL="0">
+              <a:buNone/>
+            </a:pPr>
+            <a:r>
+              <a:rPr lang="en-US" sz="900" dirty="0">
+                <a:solidFill>
+                  <a:srgbClr val="8598A0"/>
+                </a:solidFill>
+                <a:latin typeface="Calibri" pitchFamily="34" charset="0"/>
+                <a:ea typeface="Calibri" pitchFamily="34" charset="-122"/>
+                <a:cs typeface="Calibri" pitchFamily="34" charset="-120"/>
+              </a:rPr>
+              <a:t>18 juillet 2026</a:t>
+            </a:r>
+            <a:endParaRPr lang="en-US" sz="900" dirty="0"/>
+          </a:p>
+        </p:txBody>
+      </p:sp>
+    </p:spTree>
+  </p:cSld>
+  <p:clrMapOvr>
+    <a:masterClrMapping/>
+  </p:clrMapOvr>
+</p:sld>
+</file>
+
 <file path=ppt/theme/theme1.xml><?xml version="1.0" encoding="utf-8"?>
 <a:theme xmlns:a="http://schemas.openxmlformats.org/drawingml/2006/main" name="Office Theme">
   <a:themeElements>
